--- a/activity/M03A03/M03A03.pptx
+++ b/activity/M03A03/M03A03.pptx
@@ -144,18 +144,96 @@
 <file path=ppt/changesInfos/changesInfo1.xml><?xml version="1.0" encoding="utf-8"?>
 <pc:chgInfo xmlns:a="http://schemas.openxmlformats.org/drawingml/2006/main" xmlns:r="http://schemas.openxmlformats.org/officeDocument/2006/relationships" xmlns:ac="http://schemas.microsoft.com/office/drawing/2013/main/command" xmlns:pc="http://schemas.microsoft.com/office/powerpoint/2013/main/command">
   <pc:docChgLst>
-    <pc:chgData name="WILLIAM RICARDO AGUILAR PIÑA" userId="25538c52-b196-49fc-9025-2dd86a54f18a" providerId="ADAL" clId="{E50E4F8A-0456-44C3-B820-6D9DB1E8797B}"/>
-    <pc:docChg chg="modSld">
-      <pc:chgData name="WILLIAM RICARDO AGUILAR PIÑA" userId="25538c52-b196-49fc-9025-2dd86a54f18a" providerId="ADAL" clId="{E50E4F8A-0456-44C3-B820-6D9DB1E8797B}" dt="2018-06-29T15:35:20.909" v="1" actId="20577"/>
+    <pc:chgData name="WILLIAM RICARDO AGUILAR PIÑA" userId="25538c52-b196-49fc-9025-2dd86a54f18a" providerId="ADAL" clId="{4E2DAAE1-03D7-474F-9953-8EA692339A30}"/>
+    <pc:docChg chg="undo custSel modSld">
+      <pc:chgData name="WILLIAM RICARDO AGUILAR PIÑA" userId="25538c52-b196-49fc-9025-2dd86a54f18a" providerId="ADAL" clId="{4E2DAAE1-03D7-474F-9953-8EA692339A30}" dt="2024-11-14T15:53:24.147" v="43" actId="20577"/>
       <pc:docMkLst>
         <pc:docMk/>
       </pc:docMkLst>
-      <pc:sldChg chg="modSp">
-        <pc:chgData name="WILLIAM RICARDO AGUILAR PIÑA" userId="25538c52-b196-49fc-9025-2dd86a54f18a" providerId="ADAL" clId="{E50E4F8A-0456-44C3-B820-6D9DB1E8797B}" dt="2018-06-29T15:35:20.909" v="1" actId="20577"/>
+      <pc:sldChg chg="modSp mod">
+        <pc:chgData name="WILLIAM RICARDO AGUILAR PIÑA" userId="25538c52-b196-49fc-9025-2dd86a54f18a" providerId="ADAL" clId="{4E2DAAE1-03D7-474F-9953-8EA692339A30}" dt="2024-11-14T15:51:00.967" v="2" actId="20577"/>
         <pc:sldMkLst>
           <pc:docMk/>
-          <pc:sldMk cId="0" sldId="256"/>
+          <pc:sldMk cId="3355512294" sldId="334"/>
         </pc:sldMkLst>
+        <pc:spChg chg="mod">
+          <ac:chgData name="WILLIAM RICARDO AGUILAR PIÑA" userId="25538c52-b196-49fc-9025-2dd86a54f18a" providerId="ADAL" clId="{4E2DAAE1-03D7-474F-9953-8EA692339A30}" dt="2024-11-14T15:51:00.967" v="2" actId="20577"/>
+          <ac:spMkLst>
+            <pc:docMk/>
+            <pc:sldMk cId="3355512294" sldId="334"/>
+            <ac:spMk id="8" creationId="{00000000-0000-0000-0000-000000000000}"/>
+          </ac:spMkLst>
+        </pc:spChg>
+      </pc:sldChg>
+      <pc:sldChg chg="modSp mod">
+        <pc:chgData name="WILLIAM RICARDO AGUILAR PIÑA" userId="25538c52-b196-49fc-9025-2dd86a54f18a" providerId="ADAL" clId="{4E2DAAE1-03D7-474F-9953-8EA692339A30}" dt="2024-11-14T15:53:24.147" v="43" actId="20577"/>
+        <pc:sldMkLst>
+          <pc:docMk/>
+          <pc:sldMk cId="1920760524" sldId="338"/>
+        </pc:sldMkLst>
+        <pc:spChg chg="mod">
+          <ac:chgData name="WILLIAM RICARDO AGUILAR PIÑA" userId="25538c52-b196-49fc-9025-2dd86a54f18a" providerId="ADAL" clId="{4E2DAAE1-03D7-474F-9953-8EA692339A30}" dt="2024-11-14T15:53:24.147" v="43" actId="20577"/>
+          <ac:spMkLst>
+            <pc:docMk/>
+            <pc:sldMk cId="1920760524" sldId="338"/>
+            <ac:spMk id="8" creationId="{00000000-0000-0000-0000-000000000000}"/>
+          </ac:spMkLst>
+        </pc:spChg>
+        <pc:picChg chg="mod">
+          <ac:chgData name="WILLIAM RICARDO AGUILAR PIÑA" userId="25538c52-b196-49fc-9025-2dd86a54f18a" providerId="ADAL" clId="{4E2DAAE1-03D7-474F-9953-8EA692339A30}" dt="2024-11-14T15:53:13.521" v="41" actId="1076"/>
+          <ac:picMkLst>
+            <pc:docMk/>
+            <pc:sldMk cId="1920760524" sldId="338"/>
+            <ac:picMk id="5" creationId="{00000000-0000-0000-0000-000000000000}"/>
+          </ac:picMkLst>
+        </pc:picChg>
+        <pc:picChg chg="mod">
+          <ac:chgData name="WILLIAM RICARDO AGUILAR PIÑA" userId="25538c52-b196-49fc-9025-2dd86a54f18a" providerId="ADAL" clId="{4E2DAAE1-03D7-474F-9953-8EA692339A30}" dt="2024-11-14T15:53:13.521" v="41" actId="1076"/>
+          <ac:picMkLst>
+            <pc:docMk/>
+            <pc:sldMk cId="1920760524" sldId="338"/>
+            <ac:picMk id="12" creationId="{5D248159-155C-4801-BD60-11796E421EE0}"/>
+          </ac:picMkLst>
+        </pc:picChg>
+      </pc:sldChg>
+    </pc:docChg>
+  </pc:docChgLst>
+  <pc:docChgLst>
+    <pc:chgData name="WILLIAM RICARDO AGUILAR PIÑA" userId="25538c52-b196-49fc-9025-2dd86a54f18a" providerId="ADAL" clId="{C1DCD5D7-E530-4E35-B25F-DEAD50155C96}"/>
+    <pc:docChg chg="modSld">
+      <pc:chgData name="WILLIAM RICARDO AGUILAR PIÑA" userId="25538c52-b196-49fc-9025-2dd86a54f18a" providerId="ADAL" clId="{C1DCD5D7-E530-4E35-B25F-DEAD50155C96}" dt="2024-11-16T14:19:33.301" v="6" actId="20577"/>
+      <pc:docMkLst>
+        <pc:docMk/>
+      </pc:docMkLst>
+      <pc:sldChg chg="modSp mod">
+        <pc:chgData name="WILLIAM RICARDO AGUILAR PIÑA" userId="25538c52-b196-49fc-9025-2dd86a54f18a" providerId="ADAL" clId="{C1DCD5D7-E530-4E35-B25F-DEAD50155C96}" dt="2024-11-15T15:09:11.200" v="0" actId="20577"/>
+        <pc:sldMkLst>
+          <pc:docMk/>
+          <pc:sldMk cId="3206536397" sldId="333"/>
+        </pc:sldMkLst>
+        <pc:spChg chg="mod">
+          <ac:chgData name="WILLIAM RICARDO AGUILAR PIÑA" userId="25538c52-b196-49fc-9025-2dd86a54f18a" providerId="ADAL" clId="{C1DCD5D7-E530-4E35-B25F-DEAD50155C96}" dt="2024-11-15T15:09:11.200" v="0" actId="20577"/>
+          <ac:spMkLst>
+            <pc:docMk/>
+            <pc:sldMk cId="3206536397" sldId="333"/>
+            <ac:spMk id="8" creationId="{00000000-0000-0000-0000-000000000000}"/>
+          </ac:spMkLst>
+        </pc:spChg>
+      </pc:sldChg>
+      <pc:sldChg chg="addSp modSp mod">
+        <pc:chgData name="WILLIAM RICARDO AGUILAR PIÑA" userId="25538c52-b196-49fc-9025-2dd86a54f18a" providerId="ADAL" clId="{C1DCD5D7-E530-4E35-B25F-DEAD50155C96}" dt="2024-11-16T14:19:33.301" v="6" actId="20577"/>
+        <pc:sldMkLst>
+          <pc:docMk/>
+          <pc:sldMk cId="2237211416" sldId="336"/>
+        </pc:sldMkLst>
+        <pc:spChg chg="add mod">
+          <ac:chgData name="WILLIAM RICARDO AGUILAR PIÑA" userId="25538c52-b196-49fc-9025-2dd86a54f18a" providerId="ADAL" clId="{C1DCD5D7-E530-4E35-B25F-DEAD50155C96}" dt="2024-11-16T14:19:33.301" v="6" actId="20577"/>
+          <ac:spMkLst>
+            <pc:docMk/>
+            <pc:sldMk cId="2237211416" sldId="336"/>
+            <ac:spMk id="3" creationId="{A4A0B33C-EA36-7650-45B1-22CE6DAD78D5}"/>
+          </ac:spMkLst>
+        </pc:spChg>
       </pc:sldChg>
     </pc:docChg>
   </pc:docChgLst>
@@ -267,96 +345,18 @@
     </pc:docChg>
   </pc:docChgLst>
   <pc:docChgLst>
-    <pc:chgData name="WILLIAM RICARDO AGUILAR PIÑA" userId="25538c52-b196-49fc-9025-2dd86a54f18a" providerId="ADAL" clId="{C1DCD5D7-E530-4E35-B25F-DEAD50155C96}"/>
+    <pc:chgData name="WILLIAM RICARDO AGUILAR PIÑA" userId="25538c52-b196-49fc-9025-2dd86a54f18a" providerId="ADAL" clId="{E50E4F8A-0456-44C3-B820-6D9DB1E8797B}"/>
     <pc:docChg chg="modSld">
-      <pc:chgData name="WILLIAM RICARDO AGUILAR PIÑA" userId="25538c52-b196-49fc-9025-2dd86a54f18a" providerId="ADAL" clId="{C1DCD5D7-E530-4E35-B25F-DEAD50155C96}" dt="2024-11-16T14:19:33.301" v="6" actId="20577"/>
+      <pc:chgData name="WILLIAM RICARDO AGUILAR PIÑA" userId="25538c52-b196-49fc-9025-2dd86a54f18a" providerId="ADAL" clId="{E50E4F8A-0456-44C3-B820-6D9DB1E8797B}" dt="2018-06-29T15:35:20.909" v="1" actId="20577"/>
       <pc:docMkLst>
         <pc:docMk/>
       </pc:docMkLst>
-      <pc:sldChg chg="modSp mod">
-        <pc:chgData name="WILLIAM RICARDO AGUILAR PIÑA" userId="25538c52-b196-49fc-9025-2dd86a54f18a" providerId="ADAL" clId="{C1DCD5D7-E530-4E35-B25F-DEAD50155C96}" dt="2024-11-15T15:09:11.200" v="0" actId="20577"/>
+      <pc:sldChg chg="modSp">
+        <pc:chgData name="WILLIAM RICARDO AGUILAR PIÑA" userId="25538c52-b196-49fc-9025-2dd86a54f18a" providerId="ADAL" clId="{E50E4F8A-0456-44C3-B820-6D9DB1E8797B}" dt="2018-06-29T15:35:20.909" v="1" actId="20577"/>
         <pc:sldMkLst>
           <pc:docMk/>
-          <pc:sldMk cId="3206536397" sldId="333"/>
+          <pc:sldMk cId="0" sldId="256"/>
         </pc:sldMkLst>
-        <pc:spChg chg="mod">
-          <ac:chgData name="WILLIAM RICARDO AGUILAR PIÑA" userId="25538c52-b196-49fc-9025-2dd86a54f18a" providerId="ADAL" clId="{C1DCD5D7-E530-4E35-B25F-DEAD50155C96}" dt="2024-11-15T15:09:11.200" v="0" actId="20577"/>
-          <ac:spMkLst>
-            <pc:docMk/>
-            <pc:sldMk cId="3206536397" sldId="333"/>
-            <ac:spMk id="8" creationId="{00000000-0000-0000-0000-000000000000}"/>
-          </ac:spMkLst>
-        </pc:spChg>
-      </pc:sldChg>
-      <pc:sldChg chg="addSp modSp mod">
-        <pc:chgData name="WILLIAM RICARDO AGUILAR PIÑA" userId="25538c52-b196-49fc-9025-2dd86a54f18a" providerId="ADAL" clId="{C1DCD5D7-E530-4E35-B25F-DEAD50155C96}" dt="2024-11-16T14:19:33.301" v="6" actId="20577"/>
-        <pc:sldMkLst>
-          <pc:docMk/>
-          <pc:sldMk cId="2237211416" sldId="336"/>
-        </pc:sldMkLst>
-        <pc:spChg chg="add mod">
-          <ac:chgData name="WILLIAM RICARDO AGUILAR PIÑA" userId="25538c52-b196-49fc-9025-2dd86a54f18a" providerId="ADAL" clId="{C1DCD5D7-E530-4E35-B25F-DEAD50155C96}" dt="2024-11-16T14:19:33.301" v="6" actId="20577"/>
-          <ac:spMkLst>
-            <pc:docMk/>
-            <pc:sldMk cId="2237211416" sldId="336"/>
-            <ac:spMk id="3" creationId="{A4A0B33C-EA36-7650-45B1-22CE6DAD78D5}"/>
-          </ac:spMkLst>
-        </pc:spChg>
-      </pc:sldChg>
-    </pc:docChg>
-  </pc:docChgLst>
-  <pc:docChgLst>
-    <pc:chgData name="WILLIAM RICARDO AGUILAR PIÑA" userId="25538c52-b196-49fc-9025-2dd86a54f18a" providerId="ADAL" clId="{4E2DAAE1-03D7-474F-9953-8EA692339A30}"/>
-    <pc:docChg chg="undo custSel modSld">
-      <pc:chgData name="WILLIAM RICARDO AGUILAR PIÑA" userId="25538c52-b196-49fc-9025-2dd86a54f18a" providerId="ADAL" clId="{4E2DAAE1-03D7-474F-9953-8EA692339A30}" dt="2024-11-14T15:53:24.147" v="43" actId="20577"/>
-      <pc:docMkLst>
-        <pc:docMk/>
-      </pc:docMkLst>
-      <pc:sldChg chg="modSp mod">
-        <pc:chgData name="WILLIAM RICARDO AGUILAR PIÑA" userId="25538c52-b196-49fc-9025-2dd86a54f18a" providerId="ADAL" clId="{4E2DAAE1-03D7-474F-9953-8EA692339A30}" dt="2024-11-14T15:51:00.967" v="2" actId="20577"/>
-        <pc:sldMkLst>
-          <pc:docMk/>
-          <pc:sldMk cId="3355512294" sldId="334"/>
-        </pc:sldMkLst>
-        <pc:spChg chg="mod">
-          <ac:chgData name="WILLIAM RICARDO AGUILAR PIÑA" userId="25538c52-b196-49fc-9025-2dd86a54f18a" providerId="ADAL" clId="{4E2DAAE1-03D7-474F-9953-8EA692339A30}" dt="2024-11-14T15:51:00.967" v="2" actId="20577"/>
-          <ac:spMkLst>
-            <pc:docMk/>
-            <pc:sldMk cId="3355512294" sldId="334"/>
-            <ac:spMk id="8" creationId="{00000000-0000-0000-0000-000000000000}"/>
-          </ac:spMkLst>
-        </pc:spChg>
-      </pc:sldChg>
-      <pc:sldChg chg="modSp mod">
-        <pc:chgData name="WILLIAM RICARDO AGUILAR PIÑA" userId="25538c52-b196-49fc-9025-2dd86a54f18a" providerId="ADAL" clId="{4E2DAAE1-03D7-474F-9953-8EA692339A30}" dt="2024-11-14T15:53:24.147" v="43" actId="20577"/>
-        <pc:sldMkLst>
-          <pc:docMk/>
-          <pc:sldMk cId="1920760524" sldId="338"/>
-        </pc:sldMkLst>
-        <pc:spChg chg="mod">
-          <ac:chgData name="WILLIAM RICARDO AGUILAR PIÑA" userId="25538c52-b196-49fc-9025-2dd86a54f18a" providerId="ADAL" clId="{4E2DAAE1-03D7-474F-9953-8EA692339A30}" dt="2024-11-14T15:53:24.147" v="43" actId="20577"/>
-          <ac:spMkLst>
-            <pc:docMk/>
-            <pc:sldMk cId="1920760524" sldId="338"/>
-            <ac:spMk id="8" creationId="{00000000-0000-0000-0000-000000000000}"/>
-          </ac:spMkLst>
-        </pc:spChg>
-        <pc:picChg chg="mod">
-          <ac:chgData name="WILLIAM RICARDO AGUILAR PIÑA" userId="25538c52-b196-49fc-9025-2dd86a54f18a" providerId="ADAL" clId="{4E2DAAE1-03D7-474F-9953-8EA692339A30}" dt="2024-11-14T15:53:13.521" v="41" actId="1076"/>
-          <ac:picMkLst>
-            <pc:docMk/>
-            <pc:sldMk cId="1920760524" sldId="338"/>
-            <ac:picMk id="5" creationId="{00000000-0000-0000-0000-000000000000}"/>
-          </ac:picMkLst>
-        </pc:picChg>
-        <pc:picChg chg="mod">
-          <ac:chgData name="WILLIAM RICARDO AGUILAR PIÑA" userId="25538c52-b196-49fc-9025-2dd86a54f18a" providerId="ADAL" clId="{4E2DAAE1-03D7-474F-9953-8EA692339A30}" dt="2024-11-14T15:53:13.521" v="41" actId="1076"/>
-          <ac:picMkLst>
-            <pc:docMk/>
-            <pc:sldMk cId="1920760524" sldId="338"/>
-            <ac:picMk id="12" creationId="{5D248159-155C-4801-BD60-11796E421EE0}"/>
-          </ac:picMkLst>
-        </pc:picChg>
       </pc:sldChg>
     </pc:docChg>
   </pc:docChgLst>
@@ -446,7 +446,7 @@
             <a:fld id="{53CE91DE-ABC6-4D22-89A0-1765B629FB43}" type="datetimeFigureOut">
               <a:rPr lang="es-CO" smtClean="0"/>
               <a:pPr/>
-              <a:t>16/11/2024</a:t>
+              <a:t>1/08/2025</a:t>
             </a:fld>
             <a:endParaRPr lang="es-CO"/>
           </a:p>
@@ -899,7 +899,7 @@
             <a:fld id="{43DF08CB-A55A-40B1-AEFD-F19B3CFD19B5}" type="datetimeFigureOut">
               <a:rPr lang="es-CO" smtClean="0"/>
               <a:pPr/>
-              <a:t>16/11/2024</a:t>
+              <a:t>1/08/2025</a:t>
             </a:fld>
             <a:endParaRPr lang="es-CO"/>
           </a:p>
@@ -1066,7 +1066,7 @@
             <a:fld id="{43DF08CB-A55A-40B1-AEFD-F19B3CFD19B5}" type="datetimeFigureOut">
               <a:rPr lang="es-CO" smtClean="0"/>
               <a:pPr/>
-              <a:t>16/11/2024</a:t>
+              <a:t>1/08/2025</a:t>
             </a:fld>
             <a:endParaRPr lang="es-CO"/>
           </a:p>
@@ -1243,7 +1243,7 @@
             <a:fld id="{43DF08CB-A55A-40B1-AEFD-F19B3CFD19B5}" type="datetimeFigureOut">
               <a:rPr lang="es-CO" smtClean="0"/>
               <a:pPr/>
-              <a:t>16/11/2024</a:t>
+              <a:t>1/08/2025</a:t>
             </a:fld>
             <a:endParaRPr lang="es-CO"/>
           </a:p>
@@ -1410,7 +1410,7 @@
             <a:fld id="{43DF08CB-A55A-40B1-AEFD-F19B3CFD19B5}" type="datetimeFigureOut">
               <a:rPr lang="es-CO" smtClean="0"/>
               <a:pPr/>
-              <a:t>16/11/2024</a:t>
+              <a:t>1/08/2025</a:t>
             </a:fld>
             <a:endParaRPr lang="es-CO"/>
           </a:p>
@@ -1653,7 +1653,7 @@
             <a:fld id="{43DF08CB-A55A-40B1-AEFD-F19B3CFD19B5}" type="datetimeFigureOut">
               <a:rPr lang="es-CO" smtClean="0"/>
               <a:pPr/>
-              <a:t>16/11/2024</a:t>
+              <a:t>1/08/2025</a:t>
             </a:fld>
             <a:endParaRPr lang="es-CO"/>
           </a:p>
@@ -1938,7 +1938,7 @@
             <a:fld id="{43DF08CB-A55A-40B1-AEFD-F19B3CFD19B5}" type="datetimeFigureOut">
               <a:rPr lang="es-CO" smtClean="0"/>
               <a:pPr/>
-              <a:t>16/11/2024</a:t>
+              <a:t>1/08/2025</a:t>
             </a:fld>
             <a:endParaRPr lang="es-CO"/>
           </a:p>
@@ -2357,7 +2357,7 @@
             <a:fld id="{43DF08CB-A55A-40B1-AEFD-F19B3CFD19B5}" type="datetimeFigureOut">
               <a:rPr lang="es-CO" smtClean="0"/>
               <a:pPr/>
-              <a:t>16/11/2024</a:t>
+              <a:t>1/08/2025</a:t>
             </a:fld>
             <a:endParaRPr lang="es-CO"/>
           </a:p>
@@ -2472,7 +2472,7 @@
             <a:fld id="{43DF08CB-A55A-40B1-AEFD-F19B3CFD19B5}" type="datetimeFigureOut">
               <a:rPr lang="es-CO" smtClean="0"/>
               <a:pPr/>
-              <a:t>16/11/2024</a:t>
+              <a:t>1/08/2025</a:t>
             </a:fld>
             <a:endParaRPr lang="es-CO"/>
           </a:p>
@@ -2564,7 +2564,7 @@
             <a:fld id="{43DF08CB-A55A-40B1-AEFD-F19B3CFD19B5}" type="datetimeFigureOut">
               <a:rPr lang="es-CO" smtClean="0"/>
               <a:pPr/>
-              <a:t>16/11/2024</a:t>
+              <a:t>1/08/2025</a:t>
             </a:fld>
             <a:endParaRPr lang="es-CO"/>
           </a:p>
@@ -2838,7 +2838,7 @@
             <a:fld id="{43DF08CB-A55A-40B1-AEFD-F19B3CFD19B5}" type="datetimeFigureOut">
               <a:rPr lang="es-CO" smtClean="0"/>
               <a:pPr/>
-              <a:t>16/11/2024</a:t>
+              <a:t>1/08/2025</a:t>
             </a:fld>
             <a:endParaRPr lang="es-CO"/>
           </a:p>
@@ -3088,7 +3088,7 @@
             <a:fld id="{43DF08CB-A55A-40B1-AEFD-F19B3CFD19B5}" type="datetimeFigureOut">
               <a:rPr lang="es-CO" smtClean="0"/>
               <a:pPr/>
-              <a:t>16/11/2024</a:t>
+              <a:t>1/08/2025</a:t>
             </a:fld>
             <a:endParaRPr lang="es-CO"/>
           </a:p>
@@ -3301,7 +3301,7 @@
             <a:fld id="{43DF08CB-A55A-40B1-AEFD-F19B3CFD19B5}" type="datetimeFigureOut">
               <a:rPr lang="es-CO" smtClean="0"/>
               <a:pPr/>
-              <a:t>16/11/2024</a:t>
+              <a:t>1/08/2025</a:t>
             </a:fld>
             <a:endParaRPr lang="es-CO"/>
           </a:p>
@@ -6264,7 +6264,7 @@
         <p:spPr>
           <a:xfrm>
             <a:off x="1955540" y="997565"/>
-            <a:ext cx="8280920" cy="4862870"/>
+            <a:ext cx="8280920" cy="5109091"/>
           </a:xfrm>
           <a:prstGeom prst="rect">
             <a:avLst/>
@@ -6413,7 +6413,21 @@
                 <a:latin typeface="Segoe UI Light" panose="020B0502040204020203" pitchFamily="34" charset="0"/>
                 <a:cs typeface="Segoe UI Light" panose="020B0502040204020203" pitchFamily="34" charset="0"/>
               </a:rPr>
-              <a:t>Modelo HEC-RAS con geometría importada desde ArcGIS usando HEC-GeoRAS.</a:t>
+              <a:t>Modelo HECRAS_v1 con geometría importada desde ArcGIS usando HEC-GeoRAS o RAS </a:t>
+            </a:r>
+            <a:r>
+              <a:rPr lang="es-CO" sz="1600" dirty="0" err="1">
+                <a:latin typeface="Segoe UI Light" panose="020B0502040204020203" pitchFamily="34" charset="0"/>
+                <a:cs typeface="Segoe UI Light" panose="020B0502040204020203" pitchFamily="34" charset="0"/>
+              </a:rPr>
+              <a:t>Mapper</a:t>
+            </a:r>
+            <a:r>
+              <a:rPr lang="es-CO" sz="1600" dirty="0">
+                <a:latin typeface="Segoe UI Light" panose="020B0502040204020203" pitchFamily="34" charset="0"/>
+                <a:cs typeface="Segoe UI Light" panose="020B0502040204020203" pitchFamily="34" charset="0"/>
+              </a:rPr>
+              <a:t>.</a:t>
             </a:r>
           </a:p>
           <a:p>
